--- a/dist/초2/수학/수와계산/초2_수학_수와계산_01_세자리수.pptx
+++ b/dist/초2/수학/수와계산/초2_수학_수와계산_01_세자리수.pptx
@@ -123,13 +123,13 @@
   <p:extLst>
     <p:ext uri="{521415D9-36F7-43E2-AB2F-B90AF26B5E84}">
       <p14:sectionLst xmlns:p14="http://schemas.microsoft.com/office/powerpoint/2010/main">
-        <p14:section name="도입" id="{c7ecf7e5-e6f4-c22c-722c-ea99a824db5f}">
+        <p14:section name="도입" id="{0ba0573a-85b4-447e-17ba-238a78925b11}">
           <p14:sldIdLst>
             <p14:sldId id="256"/>
             <p14:sldId id="257"/>
           </p14:sldIdLst>
         </p14:section>
-        <p14:section name="개념" id="{22e174a3-6001-189e-8da4-27d8125f58f3}">
+        <p14:section name="개념" id="{a1e4a943-8421-d45d-d80a-fd94617c5bb1}">
           <p14:sldIdLst>
             <p14:sldId id="258"/>
             <p14:sldId id="259"/>
@@ -140,32 +140,32 @@
             <p14:sldId id="265"/>
           </p14:sldIdLst>
         </p14:section>
-        <p14:section name="연습" id="{d518c6a0-97bb-3b68-5cb3-f770482a8666}">
+        <p14:section name="연습" id="{cea77072-be22-a8f8-fcb0-b211b6c6a5ee}">
           <p14:sldIdLst>
             <p14:sldId id="263"/>
             <p14:sldId id="266"/>
             <p14:sldId id="267"/>
           </p14:sldIdLst>
         </p14:section>
-        <p14:section name="개념" id="{f8bbd4df-b6bb-98fd-9711-a7609c71b2ab}">
+        <p14:section name="개념" id="{028623fc-406b-b528-39cd-a84103176508}">
           <p14:sldIdLst/>
         </p14:section>
-        <p14:section name="연습" id="{3cdeb8c0-65dd-9c7e-56f1-a5007c306292}">
+        <p14:section name="연습" id="{42d5dad6-6da0-0e01-c269-a7b429754f73}">
           <p14:sldIdLst/>
         </p14:section>
-        <p14:section name="확인" id="{ab291589-d2a2-dfaa-d3d1-a7b695462d81}">
+        <p14:section name="확인" id="{3c2b8320-b5d8-c221-d230-b2162888dc55}">
           <p14:sldIdLst>
             <p14:sldId id="268"/>
             <p14:sldId id="269"/>
             <p14:sldId id="270"/>
           </p14:sldIdLst>
         </p14:section>
-        <p14:section name="정리" id="{81f343ca-8c26-b49a-9325-d8d774b425dc}">
+        <p14:section name="정리" id="{a22bd0d9-8b5a-a8e2-c74d-88f5933b8ff8}">
           <p14:sldIdLst>
             <p14:sldId id="271"/>
           </p14:sldIdLst>
         </p14:section>
-        <p14:section name="보충" id="{138b2770-1510-cbb6-a34a-def2df0fe54a}">
+        <p14:section name="보충" id="{e92756c9-8116-94b8-2c54-35d6328b8c18}">
           <p14:sldIdLst>
             <p14:sldId id="272"/>
           </p14:sldIdLst>
@@ -5323,7 +5323,7 @@
               <a:buNone/>
             </a:pPr>
             <a:r>
-              <a:rPr lang="ko-KR" altLang="en-US" sz="3200" b="1" dirty="0">
+              <a:rPr lang="en-US" altLang="ko-KR" sz="3200" b="1" dirty="0">
                 <a:solidFill>
                   <a:srgbClr val="1F2937"/>
                 </a:solidFill>
@@ -5372,7 +5372,7 @@
           </p:nvPr>
         </p:nvGraphicFramePr>
         <p:xfrm>
-          <a:off x="2985516" y="2373122"/>
+          <a:off x="2985516" y="2403602"/>
           <a:ext cx="6217920" cy="914400"/>
         </p:xfrm>
         <a:graphic>
@@ -5385,7 +5385,7 @@
                 <a:gridCol w="1554480"/>
                 <a:gridCol w="1554480"/>
               </a:tblGrid>
-              <a:tr h="650240">
+              <a:tr h="629920">
                 <a:tc>
                   <a:txBody>
                     <a:bodyPr/>
@@ -5659,7 +5659,7 @@
                   </a:tcPr>
                 </a:tc>
               </a:tr>
-              <a:tr h="650240">
+              <a:tr h="629920">
                 <a:tc>
                   <a:txBody>
                     <a:bodyPr/>
@@ -5933,7 +5933,7 @@
                   </a:tcPr>
                 </a:tc>
               </a:tr>
-              <a:tr h="650240">
+              <a:tr h="629920">
                 <a:tc>
                   <a:txBody>
                     <a:bodyPr/>
@@ -6517,7 +6517,7 @@
           </p:nvPr>
         </p:nvGraphicFramePr>
         <p:xfrm>
-          <a:off x="6551676" y="2842260"/>
+          <a:off x="6551676" y="2872740"/>
           <a:ext cx="4814316" cy="914400"/>
         </p:xfrm>
         <a:graphic>
@@ -6530,7 +6530,7 @@
                 <a:gridCol w="1203579"/>
                 <a:gridCol w="1203579"/>
               </a:tblGrid>
-              <a:tr h="650240">
+              <a:tr h="629920">
                 <a:tc>
                   <a:txBody>
                     <a:bodyPr/>
@@ -6804,7 +6804,7 @@
                   </a:tcPr>
                 </a:tc>
               </a:tr>
-              <a:tr h="650240">
+              <a:tr h="629920">
                 <a:tc>
                   <a:txBody>
                     <a:bodyPr/>
@@ -7078,7 +7078,7 @@
                   </a:tcPr>
                 </a:tc>
               </a:tr>
-              <a:tr h="650240">
+              <a:tr h="629920">
                 <a:tc>
                   <a:txBody>
                     <a:bodyPr/>
@@ -8980,7 +8980,7 @@
               <a:buNone/>
             </a:pPr>
             <a:r>
-              <a:rPr lang="ko-KR" altLang="en-US" sz="3200" dirty="0">
+              <a:rPr lang="en-US" altLang="ko-KR" sz="3200" dirty="0">
                 <a:solidFill>
                   <a:srgbClr val="1F2937"/>
                 </a:solidFill>
@@ -9058,7 +9058,7 @@
               <a:buNone/>
             </a:pPr>
             <a:r>
-              <a:rPr lang="ko-KR" altLang="en-US" sz="3200" dirty="0">
+              <a:rPr lang="en-US" altLang="ko-KR" sz="3200" dirty="0">
                 <a:solidFill>
                   <a:srgbClr val="1F2937"/>
                 </a:solidFill>
@@ -9261,7 +9261,7 @@
               <a:buNone/>
             </a:pPr>
             <a:r>
-              <a:rPr lang="ko-KR" altLang="en-US" sz="3200" dirty="0">
+              <a:rPr lang="en-US" altLang="ko-KR" sz="3200" dirty="0">
                 <a:solidFill>
                   <a:srgbClr val="1F2937"/>
                 </a:solidFill>
@@ -16339,7 +16339,7 @@
           </p:nvPr>
         </p:nvGraphicFramePr>
         <p:xfrm>
-          <a:off x="6478524" y="2915920"/>
+          <a:off x="6478524" y="2936240"/>
           <a:ext cx="4937760" cy="914400"/>
         </p:xfrm>
         <a:graphic>
@@ -16350,7 +16350,7 @@
                 <a:gridCol w="2962656"/>
                 <a:gridCol w="1975104"/>
               </a:tblGrid>
-              <a:tr h="650240">
+              <a:tr h="629920">
                 <a:tc>
                   <a:txBody>
                     <a:bodyPr/>
@@ -16488,7 +16488,7 @@
                   </a:tcPr>
                 </a:tc>
               </a:tr>
-              <a:tr h="650240">
+              <a:tr h="629920">
                 <a:tc>
                   <a:txBody>
                     <a:bodyPr/>
@@ -20337,7 +20337,7 @@
           </p:nvPr>
         </p:nvGraphicFramePr>
         <p:xfrm>
-          <a:off x="2436876" y="2042160"/>
+          <a:off x="2436876" y="2089785"/>
           <a:ext cx="7315200" cy="914400"/>
         </p:xfrm>
         <a:graphic>
@@ -20349,7 +20349,7 @@
                 <a:gridCol w="2414016"/>
                 <a:gridCol w="2414016"/>
               </a:tblGrid>
-              <a:tr h="609600">
+              <a:tr h="590550">
                 <a:tc>
                   <a:txBody>
                     <a:bodyPr/>
@@ -20555,7 +20555,7 @@
                   </a:tcPr>
                 </a:tc>
               </a:tr>
-              <a:tr h="609600">
+              <a:tr h="590550">
                 <a:tc>
                   <a:txBody>
                     <a:bodyPr/>
@@ -20761,7 +20761,7 @@
                   </a:tcPr>
                 </a:tc>
               </a:tr>
-              <a:tr h="609600">
+              <a:tr h="590550">
                 <a:tc>
                   <a:txBody>
                     <a:bodyPr/>
@@ -20967,7 +20967,7 @@
                   </a:tcPr>
                 </a:tc>
               </a:tr>
-              <a:tr h="609600">
+              <a:tr h="590550">
                 <a:tc>
                   <a:txBody>
                     <a:bodyPr/>
@@ -21173,7 +21173,7 @@
                   </a:tcPr>
                 </a:tc>
               </a:tr>
-              <a:tr h="609600">
+              <a:tr h="590550">
                 <a:tc>
                   <a:txBody>
                     <a:bodyPr/>
@@ -23611,7 +23611,7 @@
           </p:nvPr>
         </p:nvGraphicFramePr>
         <p:xfrm>
-          <a:off x="6615684" y="2477262"/>
+          <a:off x="6615684" y="2493772"/>
           <a:ext cx="4663440" cy="914400"/>
         </p:xfrm>
         <a:graphic>
@@ -23623,7 +23623,7 @@
                 <a:gridCol w="1554480"/>
                 <a:gridCol w="1554480"/>
               </a:tblGrid>
-              <a:tr h="528320">
+              <a:tr h="511810">
                 <a:tc>
                   <a:txBody>
                     <a:bodyPr/>
@@ -23829,7 +23829,7 @@
                   </a:tcPr>
                 </a:tc>
               </a:tr>
-              <a:tr h="528320">
+              <a:tr h="511810">
                 <a:tc>
                   <a:txBody>
                     <a:bodyPr/>
@@ -24276,7 +24276,7 @@
           </p:nvPr>
         </p:nvGraphicFramePr>
         <p:xfrm>
-          <a:off x="3762756" y="2773680"/>
+          <a:off x="3762756" y="2798445"/>
           <a:ext cx="4663440" cy="914400"/>
         </p:xfrm>
         <a:graphic>
@@ -24288,7 +24288,7 @@
                 <a:gridCol w="1554480"/>
                 <a:gridCol w="1554480"/>
               </a:tblGrid>
-              <a:tr h="528320">
+              <a:tr h="511810">
                 <a:tc>
                   <a:txBody>
                     <a:bodyPr/>
@@ -24494,7 +24494,7 @@
                   </a:tcPr>
                 </a:tc>
               </a:tr>
-              <a:tr h="528320">
+              <a:tr h="511810">
                 <a:tc>
                   <a:txBody>
                     <a:bodyPr/>
@@ -24700,7 +24700,7 @@
                   </a:tcPr>
                 </a:tc>
               </a:tr>
-              <a:tr h="528320">
+              <a:tr h="511810">
                 <a:tc>
                   <a:txBody>
                     <a:bodyPr/>
@@ -26599,7 +26599,7 @@
           </p:nvPr>
         </p:nvGraphicFramePr>
         <p:xfrm>
-          <a:off x="6615684" y="2477262"/>
+          <a:off x="6615684" y="2493772"/>
           <a:ext cx="4663440" cy="914400"/>
         </p:xfrm>
         <a:graphic>
@@ -26611,7 +26611,7 @@
                 <a:gridCol w="1554480"/>
                 <a:gridCol w="1554480"/>
               </a:tblGrid>
-              <a:tr h="528320">
+              <a:tr h="511810">
                 <a:tc>
                   <a:txBody>
                     <a:bodyPr/>
@@ -26817,7 +26817,7 @@
                   </a:tcPr>
                 </a:tc>
               </a:tr>
-              <a:tr h="528320">
+              <a:tr h="511810">
                 <a:tc>
                   <a:txBody>
                     <a:bodyPr/>
@@ -27723,7 +27723,7 @@
               <a:buNone/>
             </a:pPr>
             <a:r>
-              <a:rPr lang="ko-KR" altLang="en-US" sz="3200" b="1" dirty="0">
+              <a:rPr lang="en-US" altLang="ko-KR" sz="3200" b="1" dirty="0">
                 <a:solidFill>
                   <a:srgbClr val="1F2937"/>
                 </a:solidFill>
